--- a/Lectures/py_lec_13.pptx
+++ b/Lectures/py_lec_13.pptx
@@ -10896,22 +10896,13 @@
           <a:lstStyle/>
           <a:p>
             <a:r>
-              <a:rPr lang="en-US" sz="4400" kern="1200" dirty="0" err="1">
+              <a:rPr lang="en-US" sz="4400" kern="1200" dirty="0">
                 <a:solidFill>
                   <a:schemeClr val="accent3"/>
                 </a:solidFill>
                 <a:latin typeface="+mj-lt"/>
               </a:rPr>
-              <a:t>unittest</a:t>
-            </a:r>
-            <a:r>
-              <a:rPr lang="en-US" sz="4400" kern="1200" dirty="0">
-                <a:solidFill>
-                  <a:schemeClr val="accent3"/>
-                </a:solidFill>
-                <a:latin typeface="+mj-lt"/>
-              </a:rPr>
-              <a:t>: </a:t>
+              <a:t>unittest: </a:t>
             </a:r>
             <a:r>
               <a:rPr lang="ru-RU" sz="4400" kern="1200" dirty="0">
@@ -15738,22 +15729,13 @@
               </a:lnSpc>
             </a:pPr>
             <a:r>
-              <a:rPr lang="ru-RU" altLang="ru-RU" sz="1600" dirty="0" err="1">
+              <a:rPr lang="ru-RU" altLang="ru-RU" sz="1600" dirty="0">
                 <a:solidFill>
                   <a:schemeClr val="tx1"/>
                 </a:solidFill>
                 <a:latin typeface="+mn-lt"/>
               </a:rPr>
-              <a:t>pytest</a:t>
-            </a:r>
-            <a:r>
-              <a:rPr lang="ru-RU" altLang="ru-RU" sz="1600" dirty="0">
-                <a:solidFill>
-                  <a:schemeClr val="tx1"/>
-                </a:solidFill>
-                <a:latin typeface="+mn-lt"/>
-              </a:rPr>
-              <a:t> является наиболее популярной библиотекой для автоматизированного тестирования. Она также имеет множество дополнений и расширений, упрощающих создание и использование тестов</a:t>
+              <a:t>pytest является наиболее популярной библиотекой для автоматизированного тестирования. Она также имеет множество дополнений и расширений, упрощающих создание и использование тестов</a:t>
             </a:r>
           </a:p>
         </p:txBody>
@@ -20577,22 +20559,13 @@
           <a:lstStyle/>
           <a:p>
             <a:r>
-              <a:rPr lang="en-US" sz="4400" kern="1200" dirty="0" err="1">
+              <a:rPr lang="en-US" sz="4400" kern="1200" dirty="0">
                 <a:solidFill>
                   <a:schemeClr val="accent3"/>
                 </a:solidFill>
                 <a:latin typeface="+mj-lt"/>
               </a:rPr>
-              <a:t>pytest-cov</a:t>
-            </a:r>
-            <a:r>
-              <a:rPr lang="en-US" sz="4400" kern="1200" dirty="0">
-                <a:solidFill>
-                  <a:schemeClr val="accent3"/>
-                </a:solidFill>
-                <a:latin typeface="+mj-lt"/>
-              </a:rPr>
-              <a:t>: </a:t>
+              <a:t>pytest-cov: </a:t>
             </a:r>
             <a:r>
               <a:rPr lang="ru-RU" sz="4400" kern="1200" dirty="0">
@@ -20679,22 +20652,13 @@
               <a:t>файл </a:t>
             </a:r>
             <a:r>
-              <a:rPr lang="en-US" dirty="0" err="1">
+              <a:rPr lang="en-US" dirty="0">
                 <a:solidFill>
                   <a:schemeClr val="tx1"/>
                 </a:solidFill>
                 <a:latin typeface="+mn-lt"/>
               </a:rPr>
-              <a:t>cov_html</a:t>
-            </a:r>
-            <a:r>
-              <a:rPr lang="en-US" dirty="0">
-                <a:solidFill>
-                  <a:schemeClr val="tx1"/>
-                </a:solidFill>
-                <a:latin typeface="+mn-lt"/>
-              </a:rPr>
-              <a:t>/index.html) </a:t>
+              <a:t>cov_html/index.html) </a:t>
             </a:r>
             <a:r>
               <a:rPr lang="ru-RU" dirty="0">
@@ -21476,25 +21440,7 @@
                 </a:solidFill>
                 <a:latin typeface="+mn-lt"/>
               </a:rPr>
-              <a:t>Написание теста для функции </a:t>
-            </a:r>
-            <a:r>
-              <a:rPr lang="ru-RU" altLang="ru-RU" sz="1600" dirty="0" err="1">
-                <a:solidFill>
-                  <a:schemeClr val="tx1"/>
-                </a:solidFill>
-                <a:latin typeface="+mn-lt"/>
-              </a:rPr>
-              <a:t>myrange</a:t>
-            </a:r>
-            <a:r>
-              <a:rPr lang="ru-RU" altLang="ru-RU" sz="1600" dirty="0">
-                <a:solidFill>
-                  <a:schemeClr val="tx1"/>
-                </a:solidFill>
-                <a:latin typeface="+mn-lt"/>
-              </a:rPr>
-              <a:t> можно упростить, используя параметризацию. Для этого pytest предоставляет декоратор @pytest.fixture.</a:t>
+              <a:t>Написание теста для функции myrange можно упростить, используя параметризацию. Для этого pytest предоставляет декоратор @pytest.fixture.</a:t>
             </a:r>
           </a:p>
         </p:txBody>
